--- a/curso/pptx/S21.pptx
+++ b/curso/pptx/S21.pptx
@@ -3891,8 +3891,8 @@
         </p:nvSpPr>
         <p:spPr>
           <a:xfrm>
-            <a:off x="640000" y="420000"/>
-            <a:ext cx="10912000" cy="420000"/>
+            <a:off x="10652000" y="380000"/>
+            <a:ext cx="900000" cy="800000"/>
           </a:xfrm>
           <a:prstGeom prst="rect">
             <a:avLst/>
@@ -3907,17 +3907,17 @@
           <a:p>
             <a:pPr>
               <a:spcAft>
-                <a:spcPts val="810"/>
-              </a:spcAft>
-            </a:pPr>
-            <a:r>
-              <a:rPr sz="1800" b="1">
+                <a:spcPts val="1980"/>
+              </a:spcAft>
+            </a:pPr>
+            <a:r>
+              <a:rPr sz="4400" b="0">
                 <a:solidFill>
                   <a:srgbClr val="1F2A44"/>
                 </a:solidFill>
                 <a:latin typeface="Nunito Sans"/>
               </a:rPr>
-              <a:t>🦉 Aula de Filosofía</a:t>
+              <a:t>🙃</a:t>
             </a:r>
           </a:p>
         </p:txBody>

--- a/curso/pptx/S21.pptx
+++ b/curso/pptx/S21.pptx
@@ -472,426 +472,6 @@
     </a:lvl9pPr>
   </p:notesStyle>
 </p:notesMaster>
-</file>
-
-<file path=ppt/notesSlides/notesSlide1.xml><?xml version="1.0" encoding="utf-8"?>
-<p:notes xmlns:a="http://schemas.openxmlformats.org/drawingml/2006/main" xmlns:p="http://schemas.openxmlformats.org/presentationml/2006/main" xmlns:r="http://schemas.openxmlformats.org/officeDocument/2006/relationships">
-  <p:cSld>
-    <p:spTree>
-      <p:nvGrpSpPr>
-        <p:cNvPr id="1" name=""/>
-        <p:cNvGrpSpPr/>
-        <p:nvPr/>
-      </p:nvGrpSpPr>
-      <p:grpSpPr>
-        <a:xfrm>
-          <a:off x="0" y="0"/>
-          <a:ext cx="0" cy="0"/>
-          <a:chOff x="0" y="0"/>
-          <a:chExt cx="0" cy="0"/>
-        </a:xfrm>
-      </p:grpSpPr>
-      <p:sp>
-        <p:nvSpPr>
-          <p:cNvPr id="2" name="Slide Image Placeholder 1"/>
-          <p:cNvSpPr>
-            <a:spLocks noGrp="1"/>
-          </p:cNvSpPr>
-          <p:nvPr>
-            <p:ph type="sldImg" idx="2"/>
-          </p:nvPr>
-        </p:nvSpPr>
-        <p:spPr/>
-      </p:sp>
-      <p:sp>
-        <p:nvSpPr>
-          <p:cNvPr id="3" name="Notes Placeholder 2"/>
-          <p:cNvSpPr>
-            <a:spLocks noGrp="1"/>
-          </p:cNvSpPr>
-          <p:nvPr>
-            <p:ph type="body" idx="3" sz="quarter"/>
-          </p:nvPr>
-        </p:nvSpPr>
-        <p:spPr/>
-        <p:txBody>
-          <a:bodyPr/>
-          <a:lstStyle/>
-          <a:p>
-            <a:r>
-              <a:t>3 minutos. Sin apuntes. Es para recordar, no cuenta para nota.</a:t>
-            </a:r>
-          </a:p>
-        </p:txBody>
-      </p:sp>
-      <p:sp>
-        <p:nvSpPr>
-          <p:cNvPr id="4" name="Slide Number Placeholder 3"/>
-          <p:cNvSpPr>
-            <a:spLocks noGrp="1"/>
-          </p:cNvSpPr>
-          <p:nvPr>
-            <p:ph type="sldNum" idx="5" sz="quarter"/>
-          </p:nvPr>
-        </p:nvSpPr>
-        <p:spPr/>
-      </p:sp>
-    </p:spTree>
-  </p:cSld>
-  <p:clrMapOvr>
-    <a:masterClrMapping/>
-  </p:clrMapOvr>
-</p:notes>
-</file>
-
-<file path=ppt/notesSlides/notesSlide2.xml><?xml version="1.0" encoding="utf-8"?>
-<p:notes xmlns:a="http://schemas.openxmlformats.org/drawingml/2006/main" xmlns:p="http://schemas.openxmlformats.org/presentationml/2006/main" xmlns:r="http://schemas.openxmlformats.org/officeDocument/2006/relationships">
-  <p:cSld>
-    <p:spTree>
-      <p:nvGrpSpPr>
-        <p:cNvPr id="1" name=""/>
-        <p:cNvGrpSpPr/>
-        <p:nvPr/>
-      </p:nvGrpSpPr>
-      <p:grpSpPr>
-        <a:xfrm>
-          <a:off x="0" y="0"/>
-          <a:ext cx="0" cy="0"/>
-          <a:chOff x="0" y="0"/>
-          <a:chExt cx="0" cy="0"/>
-        </a:xfrm>
-      </p:grpSpPr>
-      <p:sp>
-        <p:nvSpPr>
-          <p:cNvPr id="2" name="Slide Image Placeholder 1"/>
-          <p:cNvSpPr>
-            <a:spLocks noGrp="1"/>
-          </p:cNvSpPr>
-          <p:nvPr>
-            <p:ph type="sldImg" idx="2"/>
-          </p:nvPr>
-        </p:nvSpPr>
-        <p:spPr/>
-      </p:sp>
-      <p:sp>
-        <p:nvSpPr>
-          <p:cNvPr id="3" name="Notes Placeholder 2"/>
-          <p:cNvSpPr>
-            <a:spLocks noGrp="1"/>
-          </p:cNvSpPr>
-          <p:nvPr>
-            <p:ph type="body" idx="3" sz="quarter"/>
-          </p:nvPr>
-        </p:nvSpPr>
-        <p:spPr/>
-        <p:txBody>
-          <a:bodyPr/>
-          <a:lstStyle/>
-          <a:p>
-            <a:r>
-              <a:t>3 minutos. Sin apuntes. Es para recordar, no cuenta para nota.</a:t>
-            </a:r>
-          </a:p>
-        </p:txBody>
-      </p:sp>
-      <p:sp>
-        <p:nvSpPr>
-          <p:cNvPr id="4" name="Slide Number Placeholder 3"/>
-          <p:cNvSpPr>
-            <a:spLocks noGrp="1"/>
-          </p:cNvSpPr>
-          <p:nvPr>
-            <p:ph type="sldNum" idx="5" sz="quarter"/>
-          </p:nvPr>
-        </p:nvSpPr>
-        <p:spPr/>
-      </p:sp>
-    </p:spTree>
-  </p:cSld>
-  <p:clrMapOvr>
-    <a:masterClrMapping/>
-  </p:clrMapOvr>
-</p:notes>
-</file>
-
-<file path=ppt/notesSlides/notesSlide3.xml><?xml version="1.0" encoding="utf-8"?>
-<p:notes xmlns:a="http://schemas.openxmlformats.org/drawingml/2006/main" xmlns:p="http://schemas.openxmlformats.org/presentationml/2006/main" xmlns:r="http://schemas.openxmlformats.org/officeDocument/2006/relationships">
-  <p:cSld>
-    <p:spTree>
-      <p:nvGrpSpPr>
-        <p:cNvPr id="1" name=""/>
-        <p:cNvGrpSpPr/>
-        <p:nvPr/>
-      </p:nvGrpSpPr>
-      <p:grpSpPr>
-        <a:xfrm>
-          <a:off x="0" y="0"/>
-          <a:ext cx="0" cy="0"/>
-          <a:chOff x="0" y="0"/>
-          <a:chExt cx="0" cy="0"/>
-        </a:xfrm>
-      </p:grpSpPr>
-      <p:sp>
-        <p:nvSpPr>
-          <p:cNvPr id="2" name="Slide Image Placeholder 1"/>
-          <p:cNvSpPr>
-            <a:spLocks noGrp="1"/>
-          </p:cNvSpPr>
-          <p:nvPr>
-            <p:ph type="sldImg" idx="2"/>
-          </p:nvPr>
-        </p:nvSpPr>
-        <p:spPr/>
-      </p:sp>
-      <p:sp>
-        <p:nvSpPr>
-          <p:cNvPr id="3" name="Notes Placeholder 2"/>
-          <p:cNvSpPr>
-            <a:spLocks noGrp="1"/>
-          </p:cNvSpPr>
-          <p:nvPr>
-            <p:ph type="body" idx="3" sz="quarter"/>
-          </p:nvPr>
-        </p:nvSpPr>
-        <p:spPr/>
-        <p:txBody>
-          <a:bodyPr/>
-          <a:lstStyle/>
-          <a:p>
-            <a:r>
-              <a:t>Nadie tiene que contestar: solo pensarlo.</a:t>
-            </a:r>
-          </a:p>
-        </p:txBody>
-      </p:sp>
-      <p:sp>
-        <p:nvSpPr>
-          <p:cNvPr id="4" name="Slide Number Placeholder 3"/>
-          <p:cNvSpPr>
-            <a:spLocks noGrp="1"/>
-          </p:cNvSpPr>
-          <p:nvPr>
-            <p:ph type="sldNum" idx="5" sz="quarter"/>
-          </p:nvPr>
-        </p:nvSpPr>
-        <p:spPr/>
-      </p:sp>
-    </p:spTree>
-  </p:cSld>
-  <p:clrMapOvr>
-    <a:masterClrMapping/>
-  </p:clrMapOvr>
-</p:notes>
-</file>
-
-<file path=ppt/notesSlides/notesSlide4.xml><?xml version="1.0" encoding="utf-8"?>
-<p:notes xmlns:a="http://schemas.openxmlformats.org/drawingml/2006/main" xmlns:p="http://schemas.openxmlformats.org/presentationml/2006/main" xmlns:r="http://schemas.openxmlformats.org/officeDocument/2006/relationships">
-  <p:cSld>
-    <p:spTree>
-      <p:nvGrpSpPr>
-        <p:cNvPr id="1" name=""/>
-        <p:cNvGrpSpPr/>
-        <p:nvPr/>
-      </p:nvGrpSpPr>
-      <p:grpSpPr>
-        <a:xfrm>
-          <a:off x="0" y="0"/>
-          <a:ext cx="0" cy="0"/>
-          <a:chOff x="0" y="0"/>
-          <a:chExt cx="0" cy="0"/>
-        </a:xfrm>
-      </p:grpSpPr>
-      <p:sp>
-        <p:nvSpPr>
-          <p:cNvPr id="2" name="Slide Image Placeholder 1"/>
-          <p:cNvSpPr>
-            <a:spLocks noGrp="1"/>
-          </p:cNvSpPr>
-          <p:nvPr>
-            <p:ph type="sldImg" idx="2"/>
-          </p:nvPr>
-        </p:nvSpPr>
-        <p:spPr/>
-      </p:sp>
-      <p:sp>
-        <p:nvSpPr>
-          <p:cNvPr id="3" name="Notes Placeholder 2"/>
-          <p:cNvSpPr>
-            <a:spLocks noGrp="1"/>
-          </p:cNvSpPr>
-          <p:nvPr>
-            <p:ph type="body" idx="3" sz="quarter"/>
-          </p:nvPr>
-        </p:nvSpPr>
-        <p:spPr/>
-        <p:txBody>
-          <a:bodyPr/>
-          <a:lstStyle/>
-          <a:p>
-            <a:r>
-              <a:t>Dejar unos segundos para que piensen la respuesta fácil antes de enseñar los pasos.</a:t>
-            </a:r>
-          </a:p>
-        </p:txBody>
-      </p:sp>
-      <p:sp>
-        <p:nvSpPr>
-          <p:cNvPr id="4" name="Slide Number Placeholder 3"/>
-          <p:cNvSpPr>
-            <a:spLocks noGrp="1"/>
-          </p:cNvSpPr>
-          <p:nvPr>
-            <p:ph type="sldNum" idx="5" sz="quarter"/>
-          </p:nvPr>
-        </p:nvSpPr>
-        <p:spPr/>
-      </p:sp>
-    </p:spTree>
-  </p:cSld>
-  <p:clrMapOvr>
-    <a:masterClrMapping/>
-  </p:clrMapOvr>
-</p:notes>
-</file>
-
-<file path=ppt/notesSlides/notesSlide5.xml><?xml version="1.0" encoding="utf-8"?>
-<p:notes xmlns:a="http://schemas.openxmlformats.org/drawingml/2006/main" xmlns:p="http://schemas.openxmlformats.org/presentationml/2006/main" xmlns:r="http://schemas.openxmlformats.org/officeDocument/2006/relationships">
-  <p:cSld>
-    <p:spTree>
-      <p:nvGrpSpPr>
-        <p:cNvPr id="1" name=""/>
-        <p:cNvGrpSpPr/>
-        <p:nvPr/>
-      </p:nvGrpSpPr>
-      <p:grpSpPr>
-        <a:xfrm>
-          <a:off x="0" y="0"/>
-          <a:ext cx="0" cy="0"/>
-          <a:chOff x="0" y="0"/>
-          <a:chExt cx="0" cy="0"/>
-        </a:xfrm>
-      </p:grpSpPr>
-      <p:sp>
-        <p:nvSpPr>
-          <p:cNvPr id="2" name="Slide Image Placeholder 1"/>
-          <p:cNvSpPr>
-            <a:spLocks noGrp="1"/>
-          </p:cNvSpPr>
-          <p:nvPr>
-            <p:ph type="sldImg" idx="2"/>
-          </p:nvPr>
-        </p:nvSpPr>
-        <p:spPr/>
-      </p:sp>
-      <p:sp>
-        <p:nvSpPr>
-          <p:cNvPr id="3" name="Notes Placeholder 2"/>
-          <p:cNvSpPr>
-            <a:spLocks noGrp="1"/>
-          </p:cNvSpPr>
-          <p:nvPr>
-            <p:ph type="body" idx="3" sz="quarter"/>
-          </p:nvPr>
-        </p:nvSpPr>
-        <p:spPr/>
-        <p:txBody>
-          <a:bodyPr/>
-          <a:lstStyle/>
-          <a:p>
-            <a:r>
-              <a:t>Dejar 2 minutos para que lo escriban. La diapositiva siguiente muestra el resumen.</a:t>
-            </a:r>
-          </a:p>
-        </p:txBody>
-      </p:sp>
-      <p:sp>
-        <p:nvSpPr>
-          <p:cNvPr id="4" name="Slide Number Placeholder 3"/>
-          <p:cNvSpPr>
-            <a:spLocks noGrp="1"/>
-          </p:cNvSpPr>
-          <p:nvPr>
-            <p:ph type="sldNum" idx="5" sz="quarter"/>
-          </p:nvPr>
-        </p:nvSpPr>
-        <p:spPr/>
-      </p:sp>
-    </p:spTree>
-  </p:cSld>
-  <p:clrMapOvr>
-    <a:masterClrMapping/>
-  </p:clrMapOvr>
-</p:notes>
-</file>
-
-<file path=ppt/notesSlides/notesSlide6.xml><?xml version="1.0" encoding="utf-8"?>
-<p:notes xmlns:a="http://schemas.openxmlformats.org/drawingml/2006/main" xmlns:p="http://schemas.openxmlformats.org/presentationml/2006/main" xmlns:r="http://schemas.openxmlformats.org/officeDocument/2006/relationships">
-  <p:cSld>
-    <p:spTree>
-      <p:nvGrpSpPr>
-        <p:cNvPr id="1" name=""/>
-        <p:cNvGrpSpPr/>
-        <p:nvPr/>
-      </p:nvGrpSpPr>
-      <p:grpSpPr>
-        <a:xfrm>
-          <a:off x="0" y="0"/>
-          <a:ext cx="0" cy="0"/>
-          <a:chOff x="0" y="0"/>
-          <a:chExt cx="0" cy="0"/>
-        </a:xfrm>
-      </p:grpSpPr>
-      <p:sp>
-        <p:nvSpPr>
-          <p:cNvPr id="2" name="Slide Image Placeholder 1"/>
-          <p:cNvSpPr>
-            <a:spLocks noGrp="1"/>
-          </p:cNvSpPr>
-          <p:nvPr>
-            <p:ph type="sldImg" idx="2"/>
-          </p:nvPr>
-        </p:nvSpPr>
-        <p:spPr/>
-      </p:sp>
-      <p:sp>
-        <p:nvSpPr>
-          <p:cNvPr id="3" name="Notes Placeholder 2"/>
-          <p:cNvSpPr>
-            <a:spLocks noGrp="1"/>
-          </p:cNvSpPr>
-          <p:nvPr>
-            <p:ph type="body" idx="3" sz="quarter"/>
-          </p:nvPr>
-        </p:nvSpPr>
-        <p:spPr/>
-        <p:txBody>
-          <a:bodyPr/>
-          <a:lstStyle/>
-          <a:p>
-            <a:r>
-              <a:t>Buscar: «pendiente resbaladiza falacia» · «falacia pendiente resbaladiza ejemplos»</a:t>
-            </a:r>
-          </a:p>
-        </p:txBody>
-      </p:sp>
-      <p:sp>
-        <p:nvSpPr>
-          <p:cNvPr id="4" name="Slide Number Placeholder 3"/>
-          <p:cNvSpPr>
-            <a:spLocks noGrp="1"/>
-          </p:cNvSpPr>
-          <p:nvPr>
-            <p:ph type="sldNum" idx="5" sz="quarter"/>
-          </p:nvPr>
-        </p:nvSpPr>
-        <p:spPr/>
-      </p:sp>
-    </p:spTree>
-  </p:cSld>
-  <p:clrMapOvr>
-    <a:masterClrMapping/>
-  </p:clrMapOvr>
-</p:notes>
 </file>
 
 <file path=ppt/slideLayouts/slideLayout1.xml><?xml version="1.0" encoding="utf-8"?>

--- a/curso/pptx/S21.pptx
+++ b/curso/pptx/S21.pptx
@@ -3800,7 +3800,7 @@
                 </a:solidFill>
                 <a:latin typeface="Nunito Sans"/>
               </a:rPr>
-              <a:t>Kevin: «Si hoy no hago los deberes de Lengua, suspenderé, repetiré, dejaré el instituto y nunca encontraré trabajo».</a:t>
+              <a:t>Un chico: «Si hoy no hago los deberes de Lengua, suspenderé, repetiré, dejaré el instituto y nunca encontraré trabajo».</a:t>
             </a:r>
           </a:p>
         </p:txBody>
@@ -4109,7 +4109,7 @@
                 </a:solidFill>
                 <a:latin typeface="Nunito Sans"/>
               </a:rPr>
-              <a:t>Naiara tiene el móvil al 5 %: «Si no lo cargo, se apagará esta tarde y no podré avisar a mi madre al salir de entrenar».</a:t>
+              <a:t>Una chica tiene el móvil al 5 %: «Si no lo cargo, se apagará esta tarde y no podré avisar a mi madre al salir de entrenar».</a:t>
             </a:r>
           </a:p>
         </p:txBody>
@@ -4418,7 +4418,7 @@
                 </a:solidFill>
                 <a:latin typeface="Nunito Sans"/>
               </a:rPr>
-              <a:t>Dylan: «Si empiezas fumando “solo en fiestas”, es fácil que acabes fumando cada día. La nicotina engancha».</a:t>
+              <a:t>Un chico: «Si empiezas fumando “solo en fiestas”, es fácil que acabes fumando cada día. La nicotina engancha».</a:t>
             </a:r>
           </a:p>
         </p:txBody>

--- a/curso/pptx/S21.pptx
+++ b/curso/pptx/S21.pptx
@@ -23,6 +23,7 @@
     <p:sldId id="271" r:id="rId23"/>
     <p:sldId id="272" r:id="rId24"/>
     <p:sldId id="273" r:id="rId25"/>
+    <p:sldId id="274" r:id="rId26"/>
   </p:sldIdLst>
   <p:sldSz cx="12192000" cy="6858000" type="screen4x3"/>
   <p:notesSz cx="6858000" cy="9144000"/>
@@ -3536,7 +3537,7 @@
                 </a:solidFill>
                 <a:latin typeface="Nunito Sans"/>
               </a:rPr>
-              <a:t>PENSAMIENTO CRÍTICO · SESIÓN 21 · UNIDAD 4 · FALACIAS II: RAZONAR MAL</a:t>
+              <a:t>PENSAMIENTO CRÍTICO · SESIÓN 21 · UNIDAD 4 · FALACIAS I: ATACAR, DESVIAR, EMOCIONAR</a:t>
             </a:r>
           </a:p>
         </p:txBody>
@@ -3575,7 +3576,7 @@
                 </a:solidFill>
                 <a:latin typeface="Fredoka"/>
               </a:rPr>
-              <a:t>Pendiente resbaladiza</a:t>
+              <a:t>El hombre de paja</a:t>
             </a:r>
           </a:p>
         </p:txBody>
@@ -3614,7 +3615,7 @@
                 </a:solidFill>
                 <a:latin typeface="Nunito Sans"/>
               </a:rPr>
-              <a:t>La pendiente resbaladiza encadena consecuencias cada vez peores sin dar razones de que cada paso lleve al siguiente.</a:t>
+              <a:t>El hombre de paja deforma la idea del otro para atacar una versión más fácil de tumbar.</a:t>
             </a:r>
           </a:p>
         </p:txBody>
@@ -3718,7 +3719,7 @@
                 </a:solidFill>
                 <a:latin typeface="Fredoka"/>
               </a:rPr>
-              <a:t>Caso 2 · Los deberes de Lengua</a:t>
+              <a:t>Caso 1 · El móvil en la comida</a:t>
             </a:r>
           </a:p>
         </p:txBody>
@@ -3800,7 +3801,7 @@
                 </a:solidFill>
                 <a:latin typeface="Nunito Sans"/>
               </a:rPr>
-              <a:t>Un chico: «Si hoy no hago los deberes de Lengua, suspenderé, repetiré, dejaré el instituto y nunca encontraré trabajo».</a:t>
+              <a:t>Una chica: «Podríamos dejar el móvil en la mochila durante la comida». Un chico: «Claro, tú quieres prohibir los móviles y volver a la Edad Media».</a:t>
             </a:r>
           </a:p>
         </p:txBody>
@@ -3848,7 +3849,7 @@
                 </a:solidFill>
                 <a:latin typeface="Nunito Sans"/>
               </a:rPr>
-              <a:t>¿Cuántos pasos? Cuatro, cada uno peor.</a:t>
+              <a:t>¿Qué dijo la chica? Dejar el móvil en la mochila durante la comida.</a:t>
             </a:r>
           </a:p>
           <a:p>
@@ -3873,7 +3874,7 @@
                 </a:solidFill>
                 <a:latin typeface="Nunito Sans"/>
               </a:rPr>
-              <a:t>¿Tiene razones alguno? No: un día sin deberes no suspende una asignatura.</a:t>
+              <a:t>¿Qué ataca el chico? «Prohibir los móviles» y «la Edad Media».</a:t>
             </a:r>
           </a:p>
           <a:p>
@@ -3898,7 +3899,7 @@
                 </a:solidFill>
                 <a:latin typeface="Nunito Sans"/>
               </a:rPr>
-              <a:t>Cada salto necesita una razón, y no hay ninguna.</a:t>
+              <a:t>¿Es lo mismo? No: es una versión exagerada, mucho más fácil de rechazar.</a:t>
             </a:r>
           </a:p>
           <a:p>
@@ -3923,7 +3924,7 @@
                 </a:solidFill>
                 <a:latin typeface="Nunito Sans"/>
               </a:rPr>
-              <a:t>Conclusión: pendiente resbaladiza. Hacer los deberes está bien, pero esa razón no vale.</a:t>
+              <a:t>Conclusión: hombre de paja. La idea real de la chica sigue sin respuesta.</a:t>
             </a:r>
           </a:p>
         </p:txBody>
@@ -4027,7 +4028,7 @@
                 </a:solidFill>
                 <a:latin typeface="Fredoka"/>
               </a:rPr>
-              <a:t>Caso 3 · Una cadena real</a:t>
+              <a:t>Caso 2 · Un comentario en YouTube</a:t>
             </a:r>
           </a:p>
         </p:txBody>
@@ -4109,7 +4110,7 @@
                 </a:solidFill>
                 <a:latin typeface="Nunito Sans"/>
               </a:rPr>
-              <a:t>Una chica tiene el móvil al 5 %: «Si no lo cargo, se apagará esta tarde y no podré avisar a mi madre al salir de entrenar».</a:t>
+              <a:t>Un chico comenta en un vídeo: «Tenía demasiados anuncios». Otro usuario responde: «O sea, que los creadores deberían trabajar gratis. Qué fácil».</a:t>
             </a:r>
           </a:p>
         </p:txBody>
@@ -4157,7 +4158,7 @@
                 </a:solidFill>
                 <a:latin typeface="Nunito Sans"/>
               </a:rPr>
-              <a:t>¿Cuántos pasos? Dos.</a:t>
+              <a:t>¿Qué dijo el chico? Que había demasiados anuncios.</a:t>
             </a:r>
           </a:p>
           <a:p>
@@ -4182,7 +4183,7 @@
                 </a:solidFill>
                 <a:latin typeface="Nunito Sans"/>
               </a:rPr>
-              <a:t>¿Cada paso tiene razón? Sí: con un 5 % de batería, el móvil se apaga pronto.</a:t>
+              <a:t>¿Qué atacan? Que los creadores trabajen gratis.</a:t>
             </a:r>
           </a:p>
           <a:p>
@@ -4207,7 +4208,7 @@
                 </a:solidFill>
                 <a:latin typeface="Nunito Sans"/>
               </a:rPr>
-              <a:t>¿Es exagerado el final? No: no poder avisar es algo real y pequeño.</a:t>
+              <a:t>¿Dijo eso el chico? No: menos anuncios no es cero dinero.</a:t>
             </a:r>
           </a:p>
           <a:p>
@@ -4232,7 +4233,7 @@
                 </a:solidFill>
                 <a:latin typeface="Nunito Sans"/>
               </a:rPr>
-              <a:t>Conclusión: no es falacia. Algunas consecuencias son reales cuando cada paso está bien apoyado.</a:t>
+              <a:t>Conclusión: hombre de paja por exageración.</a:t>
             </a:r>
           </a:p>
         </p:txBody>
@@ -4251,7 +4252,7 @@
     <p:bg>
       <p:bgPr>
         <a:solidFill>
-          <a:srgbClr val="F6C9A8"/>
+          <a:srgbClr val="FBF7EF"/>
         </a:solidFill>
         <a:effectLst/>
       </p:bgPr>
@@ -4293,11 +4294,11 @@
             <a:r>
               <a:rPr sz="1400" b="1">
                 <a:solidFill>
-                  <a:srgbClr val="1F2A44"/>
-                </a:solidFill>
-                <a:latin typeface="Nunito Sans"/>
-              </a:rPr>
-              <a:t>CASO TRAMPA · BLOQUE 2 · CASOS RESUELTOS</a:t>
+                  <a:srgbClr val="E8793A"/>
+                </a:solidFill>
+                <a:latin typeface="Nunito Sans"/>
+              </a:rPr>
+              <a:t>BLOQUE 2 · CASOS RESUELTOS</a:t>
             </a:r>
           </a:p>
         </p:txBody>
@@ -4336,7 +4337,7 @@
                 </a:solidFill>
                 <a:latin typeface="Fredoka"/>
               </a:rPr>
-              <a:t>⚠ Solo en las fiestas</a:t>
+              <a:t>Caso 3 · Resumir bien no es hombre de paja</a:t>
             </a:r>
           </a:p>
         </p:txBody>
@@ -4356,7 +4357,7 @@
             <a:avLst/>
           </a:prstGeom>
           <a:solidFill>
-            <a:srgbClr val="FBF7EF"/>
+            <a:srgbClr val="FFFFFF"/>
           </a:solidFill>
           <a:ln>
             <a:noFill/>
@@ -4418,7 +4419,7 @@
                 </a:solidFill>
                 <a:latin typeface="Nunito Sans"/>
               </a:rPr>
-              <a:t>Un chico: «Si empiezas fumando “solo en fiestas”, es fácil que acabes fumando cada día. La nicotina engancha».</a:t>
+              <a:t>Una chica: «Los deberes de los viernes deberían ser cortos». Un chico: «Propones menos deberes el fin de semana. No estoy de acuerdo: el lunes hay examen».</a:t>
             </a:r>
           </a:p>
         </p:txBody>
@@ -4466,7 +4467,7 @@
                 </a:solidFill>
                 <a:latin typeface="Nunito Sans"/>
               </a:rPr>
-              <a:t>Empieza con algo pequeño y acaba mal… ¿pendiente resbaladiza?</a:t>
+              <a:t>¿Resume bien el chico? Sí: «cortos» es «menos deberes».</a:t>
             </a:r>
           </a:p>
           <a:p>
@@ -4491,7 +4492,7 @@
                 </a:solidFill>
                 <a:latin typeface="Nunito Sans"/>
               </a:rPr>
-              <a:t>Parece el tobogán: un paso pequeño y un final malo.</a:t>
+              <a:t>¿Responde a la idea real? Sí, y da una razón: el examen del lunes.</a:t>
             </a:r>
           </a:p>
           <a:p>
@@ -4516,7 +4517,7 @@
                 </a:solidFill>
                 <a:latin typeface="Nunito Sans"/>
               </a:rPr>
-              <a:t>Pero hay razones para el paso: la nicotina engancha, y eso está muy estudiado.</a:t>
+              <a:t>No están de acuerdo, y eso está bien.</a:t>
             </a:r>
           </a:p>
           <a:p>
@@ -4541,32 +4542,7 @@
                 </a:solidFill>
                 <a:latin typeface="Nunito Sans"/>
               </a:rPr>
-              <a:t>Y no dice «seguro»: dice que es fácil que pase. No exagera.</a:t>
-            </a:r>
-          </a:p>
-          <a:p>
-            <a:pPr>
-              <a:spcAft>
-                <a:spcPts val="1080"/>
-              </a:spcAft>
-            </a:pPr>
-            <a:r>
-              <a:rPr sz="2400" b="1">
-                <a:solidFill>
-                  <a:srgbClr val="E8793A"/>
-                </a:solidFill>
-                <a:latin typeface="Nunito Sans"/>
-              </a:rPr>
-              <a:t>5. </a:t>
-            </a:r>
-            <a:r>
-              <a:rPr sz="2400" b="0">
-                <a:solidFill>
-                  <a:srgbClr val="1F2A44"/>
-                </a:solidFill>
-                <a:latin typeface="Nunito Sans"/>
-              </a:rPr>
-              <a:t>Conclusión: no es falacia. Lo que importa es si cada paso tiene razones, no si el final es malo.</a:t>
+              <a:t>Conclusión: no es hombre de paja. Discrepar de la idea real es legítimo.</a:t>
             </a:r>
           </a:p>
         </p:txBody>
@@ -4670,7 +4646,7 @@
                 </a:solidFill>
                 <a:latin typeface="Fredoka"/>
               </a:rPr>
-              <a:t>No toda cadena es falacia</a:t>
+              <a:t>Deformar o resumir</a:t>
             </a:r>
           </a:p>
         </p:txBody>
@@ -4735,7 +4711,7 @@
                 </a:solidFill>
                 <a:latin typeface="Nunito Sans"/>
               </a:rPr>
-              <a:t>BLOQUE 3 · NO TODA CADENA ES FALACIA</a:t>
+              <a:t>BLOQUE 3 · DEFORMAR O RESUMIR</a:t>
             </a:r>
           </a:p>
         </p:txBody>
@@ -4774,7 +4750,7 @@
                 </a:solidFill>
                 <a:latin typeface="Fredoka"/>
               </a:rPr>
-              <a:t>¿Tobogán o consecuencia real?</a:t>
+              <a:t>¿Muñeco de paja o resumen justo?</a:t>
             </a:r>
           </a:p>
         </p:txBody>
@@ -4856,7 +4832,7 @@
                 </a:solidFill>
                 <a:latin typeface="Nunito Sans"/>
               </a:rPr>
-              <a:t>Pendiente resbaladiza</a:t>
+              <a:t>Hombre de paja</a:t>
             </a:r>
           </a:p>
         </p:txBody>
@@ -4904,7 +4880,7 @@
                 </a:solidFill>
                 <a:latin typeface="Nunito Sans"/>
               </a:rPr>
-              <a:t>Pasos sin razones</a:t>
+              <a:t>Exagera o cambia la idea</a:t>
             </a:r>
           </a:p>
           <a:p>
@@ -4929,7 +4905,7 @@
                 </a:solidFill>
                 <a:latin typeface="Nunito Sans"/>
               </a:rPr>
-              <a:t>Final exagerado</a:t>
+              <a:t>Ataca algo que no se ha dicho</a:t>
             </a:r>
           </a:p>
           <a:p>
@@ -4954,7 +4930,7 @@
                 </a:solidFill>
                 <a:latin typeface="Nunito Sans"/>
               </a:rPr>
-              <a:t>Cada paso se da por seguro</a:t>
+              <a:t>Busca ganar fácil</a:t>
             </a:r>
           </a:p>
         </p:txBody>
@@ -5036,7 +5012,7 @@
                 </a:solidFill>
                 <a:latin typeface="Nunito Sans"/>
               </a:rPr>
-              <a:t>Consecuencia real</a:t>
+              <a:t>Resumen justo</a:t>
             </a:r>
           </a:p>
         </p:txBody>
@@ -5084,7 +5060,7 @@
                 </a:solidFill>
                 <a:latin typeface="Nunito Sans"/>
               </a:rPr>
-              <a:t>Cada paso con razones</a:t>
+              <a:t>Repite la idea como la dijo el otro</a:t>
             </a:r>
           </a:p>
           <a:p>
@@ -5109,7 +5085,7 @@
                 </a:solidFill>
                 <a:latin typeface="Nunito Sans"/>
               </a:rPr>
-              <a:t>Dice «puede pasar», no «pasará seguro»</a:t>
+              <a:t>El otro diría: «sí, eso digo»</a:t>
             </a:r>
           </a:p>
           <a:p>
@@ -5134,7 +5110,7 @@
                 </a:solidFill>
                 <a:latin typeface="Nunito Sans"/>
               </a:rPr>
-              <a:t>Se puede comprobar cada paso</a:t>
+              <a:t>Responde a la idea real</a:t>
             </a:r>
           </a:p>
         </p:txBody>
@@ -5153,7 +5129,7 @@
     <p:bg>
       <p:bgPr>
         <a:solidFill>
-          <a:srgbClr val="FBF7EF"/>
+          <a:srgbClr val="F6C9A8"/>
         </a:solidFill>
         <a:effectLst/>
       </p:bgPr>
@@ -5195,11 +5171,11 @@
             <a:r>
               <a:rPr sz="1400" b="1">
                 <a:solidFill>
-                  <a:srgbClr val="E8793A"/>
-                </a:solidFill>
-                <a:latin typeface="Nunito Sans"/>
-              </a:rPr>
-              <a:t>LO DE HOY EN TRES LÍNEAS</a:t>
+                  <a:srgbClr val="1F2A44"/>
+                </a:solidFill>
+                <a:latin typeface="Nunito Sans"/>
+              </a:rPr>
+              <a:t>CASO TRAMPA · BLOQUE 3 · DEFORMAR O RESUMIR</a:t>
             </a:r>
           </a:p>
         </p:txBody>
@@ -5238,21 +5214,103 @@
                 </a:solidFill>
                 <a:latin typeface="Fredoka"/>
               </a:rPr>
-              <a:t>Escríbelo tú primero, sin mirar</a:t>
-            </a:r>
-          </a:p>
-        </p:txBody>
-      </p:sp>
-      <p:sp>
-        <p:nvSpPr>
-          <p:cNvPr id="4" name="TextBox 3"/>
+              <a:t>⚠ ¿Suena exagerado = hombre de paja?</a:t>
+            </a:r>
+          </a:p>
+        </p:txBody>
+      </p:sp>
+      <p:sp>
+        <p:nvSpPr>
+          <p:cNvPr id="4" name="Rectangle 3"/>
+          <p:cNvSpPr/>
+          <p:nvPr/>
+        </p:nvSpPr>
+        <p:spPr>
+          <a:xfrm>
+            <a:off x="640000" y="1600000"/>
+            <a:ext cx="10912000" cy="1100000"/>
+          </a:xfrm>
+          <a:prstGeom prst="rect">
+            <a:avLst/>
+          </a:prstGeom>
+          <a:solidFill>
+            <a:srgbClr val="FBF7EF"/>
+          </a:solidFill>
+          <a:ln>
+            <a:noFill/>
+          </a:ln>
+        </p:spPr>
+        <p:style>
+          <a:lnRef idx="1">
+            <a:schemeClr val="accent1"/>
+          </a:lnRef>
+          <a:fillRef idx="3">
+            <a:schemeClr val="accent1"/>
+          </a:fillRef>
+          <a:effectRef idx="2">
+            <a:schemeClr val="accent1"/>
+          </a:effectRef>
+          <a:fontRef idx="minor">
+            <a:schemeClr val="lt1"/>
+          </a:fontRef>
+        </p:style>
+        <p:txBody>
+          <a:bodyPr rtlCol="0" anchor="ctr"/>
+          <a:lstStyle/>
+          <a:p>
+            <a:pPr algn="ctr"/>
+          </a:p>
+        </p:txBody>
+      </p:sp>
+      <p:sp>
+        <p:nvSpPr>
+          <p:cNvPr id="5" name="TextBox 4"/>
           <p:cNvSpPr txBox="1"/>
           <p:nvPr/>
         </p:nvSpPr>
         <p:spPr>
           <a:xfrm>
-            <a:off x="640000" y="1800000"/>
-            <a:ext cx="10912000" cy="1500000"/>
+            <a:off x="840000" y="1650000"/>
+            <a:ext cx="10512000" cy="1000000"/>
+          </a:xfrm>
+          <a:prstGeom prst="rect">
+            <a:avLst/>
+          </a:prstGeom>
+          <a:noFill/>
+        </p:spPr>
+        <p:txBody>
+          <a:bodyPr wrap="square" anchor="ctr">
+            <a:spAutoFit/>
+          </a:bodyPr>
+          <a:lstStyle/>
+          <a:p>
+            <a:pPr>
+              <a:spcAft>
+                <a:spcPts val="1170"/>
+              </a:spcAft>
+            </a:pPr>
+            <a:r>
+              <a:rPr sz="2600" b="1">
+                <a:solidFill>
+                  <a:srgbClr val="1F2A44"/>
+                </a:solidFill>
+                <a:latin typeface="Nunito Sans"/>
+              </a:rPr>
+              <a:t>Un chico: «Los deberes no sirven para nada: hay que quitarlos todos». Una chica: «Este chico quiere quitar todos los deberes, y no estoy de acuerdo».</a:t>
+            </a:r>
+          </a:p>
+        </p:txBody>
+      </p:sp>
+      <p:sp>
+        <p:nvSpPr>
+          <p:cNvPr id="6" name="TextBox 5"/>
+          <p:cNvSpPr txBox="1"/>
+          <p:nvPr/>
+        </p:nvSpPr>
+        <p:spPr>
+          <a:xfrm>
+            <a:off x="640000" y="2900000"/>
+            <a:ext cx="10912000" cy="3500000"/>
           </a:xfrm>
           <a:prstGeom prst="rect">
             <a:avLst/>
@@ -5267,17 +5325,144 @@
           <a:p>
             <a:pPr>
               <a:spcAft>
-                <a:spcPts val="1170"/>
-              </a:spcAft>
-            </a:pPr>
-            <a:r>
-              <a:rPr sz="2600" b="0">
-                <a:solidFill>
-                  <a:srgbClr val="4A5568"/>
-                </a:solidFill>
-                <a:latin typeface="Nunito Sans"/>
-              </a:rPr>
-              <a:t>Dos minutos. Después lo comparamos.</a:t>
+                <a:spcPts val="1080"/>
+              </a:spcAft>
+            </a:pPr>
+            <a:r>
+              <a:rPr sz="2400" b="1">
+                <a:solidFill>
+                  <a:srgbClr val="E8793A"/>
+                </a:solidFill>
+                <a:latin typeface="Nunito Sans"/>
+              </a:rPr>
+              <a:t>1. </a:t>
+            </a:r>
+            <a:r>
+              <a:rPr sz="2400" b="0">
+                <a:solidFill>
+                  <a:srgbClr val="1F2A44"/>
+                </a:solidFill>
+                <a:latin typeface="Nunito Sans"/>
+              </a:rPr>
+              <a:t>Suena muy exagerado. ¿Es un hombre de paja?</a:t>
+            </a:r>
+          </a:p>
+          <a:p>
+            <a:pPr>
+              <a:spcAft>
+                <a:spcPts val="1080"/>
+              </a:spcAft>
+            </a:pPr>
+            <a:r>
+              <a:rPr sz="2400" b="1">
+                <a:solidFill>
+                  <a:srgbClr val="E8793A"/>
+                </a:solidFill>
+                <a:latin typeface="Nunito Sans"/>
+              </a:rPr>
+              <a:t>2. </a:t>
+            </a:r>
+            <a:r>
+              <a:rPr sz="2400" b="0">
+                <a:solidFill>
+                  <a:srgbClr val="1F2A44"/>
+                </a:solidFill>
+                <a:latin typeface="Nunito Sans"/>
+              </a:rPr>
+              <a:t>Suena extremo, como los muñecos de paja que hemos visto.</a:t>
+            </a:r>
+          </a:p>
+          <a:p>
+            <a:pPr>
+              <a:spcAft>
+                <a:spcPts val="1080"/>
+              </a:spcAft>
+            </a:pPr>
+            <a:r>
+              <a:rPr sz="2400" b="1">
+                <a:solidFill>
+                  <a:srgbClr val="E8793A"/>
+                </a:solidFill>
+                <a:latin typeface="Nunito Sans"/>
+              </a:rPr>
+              <a:t>3. </a:t>
+            </a:r>
+            <a:r>
+              <a:rPr sz="2400" b="0">
+                <a:solidFill>
+                  <a:srgbClr val="1F2A44"/>
+                </a:solidFill>
+                <a:latin typeface="Nunito Sans"/>
+              </a:rPr>
+              <a:t>Pero ¿lo dijo el chico? Sí: «hay que quitarlos todos».</a:t>
+            </a:r>
+          </a:p>
+          <a:p>
+            <a:pPr>
+              <a:spcAft>
+                <a:spcPts val="1080"/>
+              </a:spcAft>
+            </a:pPr>
+            <a:r>
+              <a:rPr sz="2400" b="1">
+                <a:solidFill>
+                  <a:srgbClr val="E8793A"/>
+                </a:solidFill>
+                <a:latin typeface="Nunito Sans"/>
+              </a:rPr>
+              <a:t>4. </a:t>
+            </a:r>
+            <a:r>
+              <a:rPr sz="2400" b="0">
+                <a:solidFill>
+                  <a:srgbClr val="1F2A44"/>
+                </a:solidFill>
+                <a:latin typeface="Nunito Sans"/>
+              </a:rPr>
+              <a:t>El chico diría: «sí, eso digo». Es un </a:t>
+            </a:r>
+            <a:r>
+              <a:rPr sz="2400" b="1">
+                <a:solidFill>
+                  <a:srgbClr val="1F2A44"/>
+                </a:solidFill>
+                <a:latin typeface="Nunito Sans"/>
+              </a:rPr>
+              <a:t>resumen justo</a:t>
+            </a:r>
+            <a:r>
+              <a:rPr sz="2400" b="0">
+                <a:solidFill>
+                  <a:srgbClr val="1F2A44"/>
+                </a:solidFill>
+                <a:latin typeface="Nunito Sans"/>
+              </a:rPr>
+              <a:t> de una idea que ya era extrema.</a:t>
+            </a:r>
+          </a:p>
+          <a:p>
+            <a:pPr>
+              <a:spcAft>
+                <a:spcPts val="1080"/>
+              </a:spcAft>
+            </a:pPr>
+            <a:r>
+              <a:rPr sz="2400" b="1">
+                <a:solidFill>
+                  <a:srgbClr val="E8793A"/>
+                </a:solidFill>
+                <a:latin typeface="Nunito Sans"/>
+              </a:rPr>
+              <a:t>5. </a:t>
+            </a:r>
+            <a:r>
+              <a:rPr sz="2400" b="0">
+                <a:solidFill>
+                  <a:srgbClr val="1F2A44"/>
+                </a:solidFill>
+                <a:latin typeface="Nunito Sans"/>
+              </a:rPr>
+              <a:t>Conclusión: compara con lo que dijo de verdad, no con lo exagerado que suena.</a:t>
             </a:r>
           </a:p>
         </p:txBody>
@@ -5355,8 +5540,8 @@
         </p:nvSpPr>
         <p:spPr>
           <a:xfrm>
-            <a:off x="640000" y="1300000"/>
-            <a:ext cx="10912000" cy="4800000"/>
+            <a:off x="640000" y="760000"/>
+            <a:ext cx="10912000" cy="800000"/>
           </a:xfrm>
           <a:prstGeom prst="rect">
             <a:avLst/>
@@ -5371,76 +5556,56 @@
           <a:p>
             <a:pPr>
               <a:spcAft>
-                <a:spcPts val="1350"/>
-              </a:spcAft>
-            </a:pPr>
-            <a:r>
-              <a:rPr sz="3000" b="1">
-                <a:solidFill>
-                  <a:srgbClr val="E8793A"/>
-                </a:solidFill>
-                <a:latin typeface="Nunito Sans"/>
-              </a:rPr>
-              <a:t>1. </a:t>
-            </a:r>
-            <a:r>
-              <a:rPr sz="3000" b="0">
+                <a:spcPts val="1710"/>
+              </a:spcAft>
+            </a:pPr>
+            <a:r>
+              <a:rPr sz="3800" b="1">
                 <a:solidFill>
                   <a:srgbClr val="1F2A44"/>
                 </a:solidFill>
-                <a:latin typeface="Nunito Sans"/>
-              </a:rPr>
-              <a:t>La pendiente resbaladiza encadena consecuencias cada vez peores sin dar razones.</a:t>
-            </a:r>
-          </a:p>
-          <a:p>
-            <a:pPr>
-              <a:spcAft>
-                <a:spcPts val="1350"/>
-              </a:spcAft>
-            </a:pPr>
-            <a:r>
-              <a:rPr sz="3000" b="1">
-                <a:solidFill>
-                  <a:srgbClr val="E8793A"/>
-                </a:solidFill>
-                <a:latin typeface="Nunito Sans"/>
-              </a:rPr>
-              <a:t>2. </a:t>
-            </a:r>
-            <a:r>
-              <a:rPr sz="3000" b="0">
-                <a:solidFill>
-                  <a:srgbClr val="1F2A44"/>
-                </a:solidFill>
-                <a:latin typeface="Nunito Sans"/>
-              </a:rPr>
-              <a:t>Para desmontarla: ¿por qué un paso lleva seguro al siguiente?</a:t>
-            </a:r>
-          </a:p>
-          <a:p>
-            <a:pPr>
-              <a:spcAft>
-                <a:spcPts val="1350"/>
-              </a:spcAft>
-            </a:pPr>
-            <a:r>
-              <a:rPr sz="3000" b="1">
-                <a:solidFill>
-                  <a:srgbClr val="E8793A"/>
-                </a:solidFill>
-                <a:latin typeface="Nunito Sans"/>
-              </a:rPr>
-              <a:t>3. </a:t>
-            </a:r>
-            <a:r>
-              <a:rPr sz="3000" b="0">
-                <a:solidFill>
-                  <a:srgbClr val="1F2A44"/>
-                </a:solidFill>
-                <a:latin typeface="Nunito Sans"/>
-              </a:rPr>
-              <a:t>No toda cadena es falacia: si cada paso tiene razones, el aviso vale.</a:t>
+                <a:latin typeface="Fredoka"/>
+              </a:rPr>
+              <a:t>Escríbelo tú primero, sin mirar</a:t>
+            </a:r>
+          </a:p>
+        </p:txBody>
+      </p:sp>
+      <p:sp>
+        <p:nvSpPr>
+          <p:cNvPr id="4" name="TextBox 3"/>
+          <p:cNvSpPr txBox="1"/>
+          <p:nvPr/>
+        </p:nvSpPr>
+        <p:spPr>
+          <a:xfrm>
+            <a:off x="640000" y="1800000"/>
+            <a:ext cx="10912000" cy="1500000"/>
+          </a:xfrm>
+          <a:prstGeom prst="rect">
+            <a:avLst/>
+          </a:prstGeom>
+          <a:noFill/>
+        </p:spPr>
+        <p:txBody>
+          <a:bodyPr wrap="square">
+            <a:spAutoFit/>
+          </a:bodyPr>
+          <a:lstStyle/>
+          <a:p>
+            <a:pPr>
+              <a:spcAft>
+                <a:spcPts val="1170"/>
+              </a:spcAft>
+            </a:pPr>
+            <a:r>
+              <a:rPr sz="2600" b="0">
+                <a:solidFill>
+                  <a:srgbClr val="4A5568"/>
+                </a:solidFill>
+                <a:latin typeface="Nunito Sans"/>
+              </a:rPr>
+              <a:t>Dos minutos. Después lo comparamos.</a:t>
             </a:r>
           </a:p>
         </p:txBody>
@@ -5459,7 +5624,7 @@
     <p:bg>
       <p:bgPr>
         <a:solidFill>
-          <a:srgbClr val="1F2A44"/>
+          <a:srgbClr val="FBF7EF"/>
         </a:solidFill>
         <a:effectLst/>
       </p:bgPr>
@@ -5501,11 +5666,11 @@
             <a:r>
               <a:rPr sz="1400" b="1">
                 <a:solidFill>
-                  <a:srgbClr val="F4B183"/>
-                </a:solidFill>
-                <a:latin typeface="Nunito Sans"/>
-              </a:rPr>
-              <a:t>VÍDEO</a:t>
+                  <a:srgbClr val="E8793A"/>
+                </a:solidFill>
+                <a:latin typeface="Nunito Sans"/>
+              </a:rPr>
+              <a:t>LO DE HOY EN TRES LÍNEAS</a:t>
             </a:r>
           </a:p>
         </p:txBody>
@@ -5518,8 +5683,8 @@
         </p:nvSpPr>
         <p:spPr>
           <a:xfrm>
-            <a:off x="640000" y="760000"/>
-            <a:ext cx="10912000" cy="800000"/>
+            <a:off x="640000" y="1300000"/>
+            <a:ext cx="10912000" cy="4800000"/>
           </a:xfrm>
           <a:prstGeom prst="rect">
             <a:avLst/>
@@ -5534,56 +5699,76 @@
           <a:p>
             <a:pPr>
               <a:spcAft>
-                <a:spcPts val="1620"/>
-              </a:spcAft>
-            </a:pPr>
-            <a:r>
-              <a:rPr sz="3600" b="1">
-                <a:solidFill>
-                  <a:srgbClr val="FBF7EF"/>
-                </a:solidFill>
-                <a:latin typeface="Fredoka"/>
-              </a:rPr>
-              <a:t>La falacia de la pendiente resbaladiza</a:t>
-            </a:r>
-          </a:p>
-        </p:txBody>
-      </p:sp>
-      <p:sp>
-        <p:nvSpPr>
-          <p:cNvPr id="4" name="TextBox 3"/>
-          <p:cNvSpPr txBox="1"/>
-          <p:nvPr/>
-        </p:nvSpPr>
-        <p:spPr>
-          <a:xfrm>
-            <a:off x="640000" y="2200000"/>
-            <a:ext cx="10912000" cy="2000000"/>
-          </a:xfrm>
-          <a:prstGeom prst="rect">
-            <a:avLst/>
-          </a:prstGeom>
-          <a:noFill/>
-        </p:spPr>
-        <p:txBody>
-          <a:bodyPr wrap="square">
-            <a:spAutoFit/>
-          </a:bodyPr>
-          <a:lstStyle/>
-          <a:p>
-            <a:pPr>
-              <a:spcAft>
-                <a:spcPts val="1080"/>
-              </a:spcAft>
-            </a:pPr>
-            <a:r>
-              <a:rPr sz="2400" b="0">
-                <a:solidFill>
-                  <a:srgbClr val="C9D3E6"/>
-                </a:solidFill>
-                <a:latin typeface="Nunito Sans"/>
-              </a:rPr>
-              <a:t>Ver cadenas de consecuencias exageradas, a menudo con humor.</a:t>
+                <a:spcPts val="1350"/>
+              </a:spcAft>
+            </a:pPr>
+            <a:r>
+              <a:rPr sz="3000" b="1">
+                <a:solidFill>
+                  <a:srgbClr val="E8793A"/>
+                </a:solidFill>
+                <a:latin typeface="Nunito Sans"/>
+              </a:rPr>
+              <a:t>1. </a:t>
+            </a:r>
+            <a:r>
+              <a:rPr sz="3000" b="0">
+                <a:solidFill>
+                  <a:srgbClr val="1F2A44"/>
+                </a:solidFill>
+                <a:latin typeface="Nunito Sans"/>
+              </a:rPr>
+              <a:t>El hombre de paja deforma la idea del otro para atacarla más fácil.</a:t>
+            </a:r>
+          </a:p>
+          <a:p>
+            <a:pPr>
+              <a:spcAft>
+                <a:spcPts val="1350"/>
+              </a:spcAft>
+            </a:pPr>
+            <a:r>
+              <a:rPr sz="3000" b="1">
+                <a:solidFill>
+                  <a:srgbClr val="E8793A"/>
+                </a:solidFill>
+                <a:latin typeface="Nunito Sans"/>
+              </a:rPr>
+              <a:t>2. </a:t>
+            </a:r>
+            <a:r>
+              <a:rPr sz="3000" b="0">
+                <a:solidFill>
+                  <a:srgbClr val="1F2A44"/>
+                </a:solidFill>
+                <a:latin typeface="Nunito Sans"/>
+              </a:rPr>
+              <a:t>Se fabrica exagerando, recortando o inventando lo que el otro dijo.</a:t>
+            </a:r>
+          </a:p>
+          <a:p>
+            <a:pPr>
+              <a:spcAft>
+                <a:spcPts val="1350"/>
+              </a:spcAft>
+            </a:pPr>
+            <a:r>
+              <a:rPr sz="3000" b="1">
+                <a:solidFill>
+                  <a:srgbClr val="E8793A"/>
+                </a:solidFill>
+                <a:latin typeface="Nunito Sans"/>
+              </a:rPr>
+              <a:t>3. </a:t>
+            </a:r>
+            <a:r>
+              <a:rPr sz="3000" b="0">
+                <a:solidFill>
+                  <a:srgbClr val="1F2A44"/>
+                </a:solidFill>
+                <a:latin typeface="Nunito Sans"/>
+              </a:rPr>
+              <a:t>Para desmontarlo, pregunta: ¿es eso exactamente lo que he dicho?</a:t>
             </a:r>
           </a:p>
         </p:txBody>
@@ -5648,6 +5833,149 @@
                 </a:solidFill>
                 <a:latin typeface="Nunito Sans"/>
               </a:rPr>
+              <a:t>VÍDEO</a:t>
+            </a:r>
+          </a:p>
+        </p:txBody>
+      </p:sp>
+      <p:sp>
+        <p:nvSpPr>
+          <p:cNvPr id="3" name="TextBox 2"/>
+          <p:cNvSpPr txBox="1"/>
+          <p:nvPr/>
+        </p:nvSpPr>
+        <p:spPr>
+          <a:xfrm>
+            <a:off x="640000" y="760000"/>
+            <a:ext cx="10912000" cy="800000"/>
+          </a:xfrm>
+          <a:prstGeom prst="rect">
+            <a:avLst/>
+          </a:prstGeom>
+          <a:noFill/>
+        </p:spPr>
+        <p:txBody>
+          <a:bodyPr wrap="square">
+            <a:spAutoFit/>
+          </a:bodyPr>
+          <a:lstStyle/>
+          <a:p>
+            <a:pPr>
+              <a:spcAft>
+                <a:spcPts val="1620"/>
+              </a:spcAft>
+            </a:pPr>
+            <a:r>
+              <a:rPr sz="3600" b="1">
+                <a:solidFill>
+                  <a:srgbClr val="FBF7EF"/>
+                </a:solidFill>
+                <a:latin typeface="Fredoka"/>
+              </a:rPr>
+              <a:t>La falacia del hombre de paja</a:t>
+            </a:r>
+          </a:p>
+        </p:txBody>
+      </p:sp>
+      <p:sp>
+        <p:nvSpPr>
+          <p:cNvPr id="4" name="TextBox 3"/>
+          <p:cNvSpPr txBox="1"/>
+          <p:nvPr/>
+        </p:nvSpPr>
+        <p:spPr>
+          <a:xfrm>
+            <a:off x="640000" y="2200000"/>
+            <a:ext cx="10912000" cy="2000000"/>
+          </a:xfrm>
+          <a:prstGeom prst="rect">
+            <a:avLst/>
+          </a:prstGeom>
+          <a:noFill/>
+        </p:spPr>
+        <p:txBody>
+          <a:bodyPr wrap="square">
+            <a:spAutoFit/>
+          </a:bodyPr>
+          <a:lstStyle/>
+          <a:p>
+            <a:pPr>
+              <a:spcAft>
+                <a:spcPts val="1080"/>
+              </a:spcAft>
+            </a:pPr>
+            <a:r>
+              <a:rPr sz="2400" b="0">
+                <a:solidFill>
+                  <a:srgbClr val="C9D3E6"/>
+                </a:solidFill>
+                <a:latin typeface="Nunito Sans"/>
+              </a:rPr>
+              <a:t>Ver el truco en discusiones y en dibujos animados.</a:t>
+            </a:r>
+          </a:p>
+        </p:txBody>
+      </p:sp>
+    </p:spTree>
+  </p:cSld>
+  <p:clrMapOvr>
+    <a:masterClrMapping/>
+  </p:clrMapOvr>
+</p:sld>
+</file>
+
+<file path=ppt/slides/slide19.xml><?xml version="1.0" encoding="utf-8"?>
+<p:sld xmlns:a="http://schemas.openxmlformats.org/drawingml/2006/main" xmlns:p="http://schemas.openxmlformats.org/presentationml/2006/main" xmlns:r="http://schemas.openxmlformats.org/officeDocument/2006/relationships">
+  <p:cSld>
+    <p:bg>
+      <p:bgPr>
+        <a:solidFill>
+          <a:srgbClr val="1F2A44"/>
+        </a:solidFill>
+        <a:effectLst/>
+      </p:bgPr>
+    </p:bg>
+    <p:spTree>
+      <p:nvGrpSpPr>
+        <p:cNvPr id="1" name=""/>
+        <p:cNvGrpSpPr/>
+        <p:nvPr/>
+      </p:nvGrpSpPr>
+      <p:grpSpPr/>
+      <p:sp>
+        <p:nvSpPr>
+          <p:cNvPr id="2" name="TextBox 1"/>
+          <p:cNvSpPr txBox="1"/>
+          <p:nvPr/>
+        </p:nvSpPr>
+        <p:spPr>
+          <a:xfrm>
+            <a:off x="640000" y="380000"/>
+            <a:ext cx="10912000" cy="420000"/>
+          </a:xfrm>
+          <a:prstGeom prst="rect">
+            <a:avLst/>
+          </a:prstGeom>
+          <a:noFill/>
+        </p:spPr>
+        <p:txBody>
+          <a:bodyPr wrap="square">
+            <a:spAutoFit/>
+          </a:bodyPr>
+          <a:lstStyle/>
+          <a:p>
+            <a:pPr>
+              <a:spcAft>
+                <a:spcPts val="630"/>
+              </a:spcAft>
+            </a:pPr>
+            <a:r>
+              <a:rPr sz="1400" b="1">
+                <a:solidFill>
+                  <a:srgbClr val="F4B183"/>
+                </a:solidFill>
+                <a:latin typeface="Nunito Sans"/>
+              </a:rPr>
               <a:t>AHORA, LA HOJA DEL DÍA</a:t>
             </a:r>
           </a:p>
@@ -6241,7 +6569,7 @@
                 </a:solidFill>
                 <a:latin typeface="Nunito Sans"/>
               </a:rPr>
-              <a:t>En un falso dilema, las opciones escondidas pueden estar en ______, en las dos a la vez o en otra distinta.  (sesión 20)</a:t>
+              <a:t>El ataque a la persona ataca a quien habla en lugar de responder a su ______.  (sesión 20)</a:t>
             </a:r>
           </a:p>
           <a:p>
@@ -6266,7 +6594,7 @@
                 </a:solidFill>
                 <a:latin typeface="Nunito Sans"/>
               </a:rPr>
-              <a:t>El falso dilema presenta solo ______ opciones cuando en realidad hay más.  (sesión 20)</a:t>
+              <a:t>Pregunta que lo desmonta: ¿qué tiene que ver quién lo ______ con la idea?  (sesión 20)</a:t>
             </a:r>
           </a:p>
           <a:p>
@@ -6291,7 +6619,7 @@
                 </a:solidFill>
                 <a:latin typeface="Nunito Sans"/>
               </a:rPr>
-              <a:t>Si la razón es ______, el argumento se cae.  (sesión 9)</a:t>
+              <a:t>La prueba social es un ______ de la mente: a veces ayuda y a veces engaña.  (sesión 9)</a:t>
             </a:r>
           </a:p>
         </p:txBody>
@@ -6443,7 +6771,7 @@
                 </a:solidFill>
                 <a:latin typeface="Nunito Sans"/>
               </a:rPr>
-              <a:t>En un falso dilema, las opciones escondidas pueden estar en </a:t>
+              <a:t>El ataque a la persona ataca a quien habla en lugar de responder a su </a:t>
             </a:r>
             <a:r>
               <a:rPr sz="2600" b="1">
@@ -6452,7 +6780,7 @@
                 </a:solidFill>
                 <a:latin typeface="Nunito Sans"/>
               </a:rPr>
-              <a:t>medio</a:t>
+              <a:t>argumento</a:t>
             </a:r>
             <a:r>
               <a:rPr sz="2600" b="0">
@@ -6461,7 +6789,7 @@
                 </a:solidFill>
                 <a:latin typeface="Nunito Sans"/>
               </a:rPr>
-              <a:t>, en las dos a la vez o en otra distinta.  (sesión 20)</a:t>
+              <a:t>.  (sesión 20)</a:t>
             </a:r>
           </a:p>
           <a:p>
@@ -6486,7 +6814,7 @@
                 </a:solidFill>
                 <a:latin typeface="Nunito Sans"/>
               </a:rPr>
-              <a:t>El falso dilema presenta solo </a:t>
+              <a:t>Pregunta que lo desmonta: ¿qué tiene que ver quién lo </a:t>
             </a:r>
             <a:r>
               <a:rPr sz="2600" b="1">
@@ -6495,7 +6823,7 @@
                 </a:solidFill>
                 <a:latin typeface="Nunito Sans"/>
               </a:rPr>
-              <a:t>dos</a:t>
+              <a:t>dice</a:t>
             </a:r>
             <a:r>
               <a:rPr sz="2600" b="0">
@@ -6504,7 +6832,7 @@
                 </a:solidFill>
                 <a:latin typeface="Nunito Sans"/>
               </a:rPr>
-              <a:t> opciones cuando en realidad hay más.  (sesión 20)</a:t>
+              <a:t> con la idea?  (sesión 20)</a:t>
             </a:r>
           </a:p>
           <a:p>
@@ -6529,7 +6857,7 @@
                 </a:solidFill>
                 <a:latin typeface="Nunito Sans"/>
               </a:rPr>
-              <a:t>Si la razón es </a:t>
+              <a:t>La prueba social es un </a:t>
             </a:r>
             <a:r>
               <a:rPr sz="2600" b="1">
@@ -6538,7 +6866,7 @@
                 </a:solidFill>
                 <a:latin typeface="Nunito Sans"/>
               </a:rPr>
-              <a:t>falsa</a:t>
+              <a:t>atajo</a:t>
             </a:r>
             <a:r>
               <a:rPr sz="2600" b="0">
@@ -6547,7 +6875,7 @@
                 </a:solidFill>
                 <a:latin typeface="Nunito Sans"/>
               </a:rPr>
-              <a:t>, el argumento se cae.  (sesión 9)</a:t>
+              <a:t> de la mente: a veces ayuda y a veces engaña.  (sesión 9)</a:t>
             </a:r>
           </a:p>
         </p:txBody>
@@ -6694,7 +7022,7 @@
                 </a:solidFill>
                 <a:latin typeface="Nunito Sans"/>
               </a:rPr>
-              <a:t>«Si hoy te dejo quedarte hasta las diez, mañana querrás hasta las doce, y acabarás no volviendo a casa.»</a:t>
+              <a:t>Una chica: «Podríamos dejar el móvil en la mochila durante la comida». Un chico: «Claro, tú quieres prohibir los móviles y volver a la Edad Media».</a:t>
             </a:r>
           </a:p>
         </p:txBody>
@@ -6733,7 +7061,7 @@
                 </a:solidFill>
                 <a:latin typeface="Nunito Sans"/>
               </a:rPr>
-              <a:t>¿Es seguro que un paso lleva al siguiente?</a:t>
+              <a:t>¿Ha dicho eso la chica? ¿Contra qué idea está peleando el chico?</a:t>
             </a:r>
           </a:p>
         </p:txBody>
@@ -6837,7 +7165,7 @@
                 </a:solidFill>
                 <a:latin typeface="Fredoka"/>
               </a:rPr>
-              <a:t>Cadenas de consecuencias</a:t>
+              <a:t>Qué es el hombre de paja</a:t>
             </a:r>
           </a:p>
         </p:txBody>
@@ -6902,7 +7230,7 @@
                 </a:solidFill>
                 <a:latin typeface="Nunito Sans"/>
               </a:rPr>
-              <a:t>BLOQUE 1 · CADENAS DE CONSECUENCIAS</a:t>
+              <a:t>BLOQUE 1 · QUÉ ES EL HOMBRE DE PAJA</a:t>
             </a:r>
           </a:p>
         </p:txBody>
@@ -6941,7 +7269,7 @@
                 </a:solidFill>
                 <a:latin typeface="Fredoka"/>
               </a:rPr>
-              <a:t>Pendiente resbaladiza</a:t>
+              <a:t>Hombre de paja</a:t>
             </a:r>
           </a:p>
         </p:txBody>
@@ -7023,7 +7351,7 @@
                 </a:solidFill>
                 <a:latin typeface="Nunito Sans"/>
               </a:rPr>
-              <a:t>Decir que un primer paso pequeño llevará sin remedio a una cadena de consecuencias terribles, sin dar razones de cada paso.</a:t>
+              <a:t>Deformar la idea del otro, exagerándola o cambiándola, para atacar esa versión falsa en lugar de la real.</a:t>
             </a:r>
           </a:p>
         </p:txBody>
@@ -7071,7 +7399,7 @@
                 </a:solidFill>
                 <a:latin typeface="Nunito Sans"/>
               </a:rPr>
-              <a:t>Como un tobogán: si te subes, no puedes parar</a:t>
+              <a:t>Un muñeco de paja se parece a una persona</a:t>
             </a:r>
           </a:p>
           <a:p>
@@ -7096,7 +7424,7 @@
                 </a:solidFill>
                 <a:latin typeface="Nunito Sans"/>
               </a:rPr>
-              <a:t>Aunque cada paso sea posible, toda la cadena es poco probable</a:t>
+              <a:t>Pero se tumba de un golpe</a:t>
             </a:r>
           </a:p>
           <a:p>
@@ -7130,7 +7458,7 @@
                 </a:solidFill>
                 <a:latin typeface="Nunito Sans"/>
               </a:rPr>
-              <a:t>¿por qué un paso lleva seguro al siguiente?</a:t>
+              <a:t>¿es eso exactamente lo que he dicho?</a:t>
             </a:r>
           </a:p>
         </p:txBody>
@@ -7195,7 +7523,7 @@
                 </a:solidFill>
                 <a:latin typeface="Nunito Sans"/>
               </a:rPr>
-              <a:t>BLOQUE 1 · CADENAS DE CONSECUENCIAS</a:t>
+              <a:t>BLOQUE 1 · QUÉ ES EL HOMBRE DE PAJA</a:t>
             </a:r>
           </a:p>
         </p:txBody>
@@ -7234,7 +7562,7 @@
                 </a:solidFill>
                 <a:latin typeface="Fredoka"/>
               </a:rPr>
-              <a:t>Cómo reconocerla</a:t>
+              <a:t>Tres formas de fabricar el muñeco</a:t>
             </a:r>
           </a:p>
         </p:txBody>
@@ -7276,22 +7604,56 @@
               <a:t>• </a:t>
             </a:r>
             <a:r>
+              <a:rPr sz="2800" b="1">
+                <a:solidFill>
+                  <a:srgbClr val="1F2A44"/>
+                </a:solidFill>
+                <a:latin typeface="Nunito Sans"/>
+              </a:rPr>
+              <a:t>Exagerar:</a:t>
+            </a:r>
+            <a:r>
               <a:rPr sz="2800" b="0">
                 <a:solidFill>
                   <a:srgbClr val="1F2A44"/>
                 </a:solidFill>
                 <a:latin typeface="Nunito Sans"/>
               </a:rPr>
-              <a:t>Empieza con algo pequeño y acaba en algo </a:t>
-            </a:r>
+              <a:t> «menos azúcar» se convierte en «prohibir los dulces»</a:t>
+            </a:r>
+          </a:p>
+          <a:p>
+            <a:pPr>
+              <a:spcAft>
+                <a:spcPts val="1260"/>
+              </a:spcAft>
+            </a:pPr>
             <a:r>
               <a:rPr sz="2800" b="1">
                 <a:solidFill>
+                  <a:srgbClr val="E8793A"/>
+                </a:solidFill>
+                <a:latin typeface="Nunito Sans"/>
+              </a:rPr>
+              <a:t>• </a:t>
+            </a:r>
+            <a:r>
+              <a:rPr sz="2800" b="1">
+                <a:solidFill>
                   <a:srgbClr val="1F2A44"/>
                 </a:solidFill>
                 <a:latin typeface="Nunito Sans"/>
               </a:rPr>
-              <a:t>terrible</a:t>
+              <a:t>Recortar:</a:t>
+            </a:r>
+            <a:r>
+              <a:rPr sz="2800" b="0">
+                <a:solidFill>
+                  <a:srgbClr val="1F2A44"/>
+                </a:solidFill>
+                <a:latin typeface="Nunito Sans"/>
+              </a:rPr>
+              <a:t> quitar la parte que hace razonable la idea</a:t>
             </a:r>
           </a:p>
           <a:p>
@@ -7310,81 +7672,22 @@
               <a:t>• </a:t>
             </a:r>
             <a:r>
+              <a:rPr sz="2800" b="1">
+                <a:solidFill>
+                  <a:srgbClr val="1F2A44"/>
+                </a:solidFill>
+                <a:latin typeface="Nunito Sans"/>
+              </a:rPr>
+              <a:t>Inventar:</a:t>
+            </a:r>
+            <a:r>
               <a:rPr sz="2800" b="0">
                 <a:solidFill>
                   <a:srgbClr val="1F2A44"/>
                 </a:solidFill>
                 <a:latin typeface="Nunito Sans"/>
               </a:rPr>
-              <a:t>Muchos «y entonces…» seguidos</a:t>
-            </a:r>
-          </a:p>
-          <a:p>
-            <a:pPr>
-              <a:spcAft>
-                <a:spcPts val="1260"/>
-              </a:spcAft>
-            </a:pPr>
-            <a:r>
-              <a:rPr sz="2800" b="1">
-                <a:solidFill>
-                  <a:srgbClr val="E8793A"/>
-                </a:solidFill>
-                <a:latin typeface="Nunito Sans"/>
-              </a:rPr>
-              <a:t>• </a:t>
-            </a:r>
-            <a:r>
-              <a:rPr sz="2800" b="0">
-                <a:solidFill>
-                  <a:srgbClr val="1F2A44"/>
-                </a:solidFill>
-                <a:latin typeface="Nunito Sans"/>
-              </a:rPr>
-              <a:t>Nadie explica </a:t>
-            </a:r>
-            <a:r>
-              <a:rPr sz="2800" b="1">
-                <a:solidFill>
-                  <a:srgbClr val="1F2A44"/>
-                </a:solidFill>
-                <a:latin typeface="Nunito Sans"/>
-              </a:rPr>
-              <a:t>por qué</a:t>
-            </a:r>
-            <a:r>
-              <a:rPr sz="2800" b="0">
-                <a:solidFill>
-                  <a:srgbClr val="1F2A44"/>
-                </a:solidFill>
-                <a:latin typeface="Nunito Sans"/>
-              </a:rPr>
-              <a:t> cada paso lleva al siguiente</a:t>
-            </a:r>
-          </a:p>
-          <a:p>
-            <a:pPr>
-              <a:spcAft>
-                <a:spcPts val="1260"/>
-              </a:spcAft>
-            </a:pPr>
-            <a:r>
-              <a:rPr sz="2800" b="1">
-                <a:solidFill>
-                  <a:srgbClr val="E8793A"/>
-                </a:solidFill>
-                <a:latin typeface="Nunito Sans"/>
-              </a:rPr>
-              <a:t>• </a:t>
-            </a:r>
-            <a:r>
-              <a:rPr sz="2800" b="0">
-                <a:solidFill>
-                  <a:srgbClr val="1F2A44"/>
-                </a:solidFill>
-                <a:latin typeface="Nunito Sans"/>
-              </a:rPr>
-              <a:t>Se parece a la apelación al miedo: asusta con el final (sesión 16)</a:t>
+              <a:t> poner en su boca algo que no ha dicho</a:t>
             </a:r>
           </a:p>
         </p:txBody>
@@ -7398,6 +7701,320 @@
 </file>
 
 <file path=ppt/slides/slide8.xml><?xml version="1.0" encoding="utf-8"?>
+<p:sld xmlns:a="http://schemas.openxmlformats.org/drawingml/2006/main" xmlns:p="http://schemas.openxmlformats.org/presentationml/2006/main" xmlns:r="http://schemas.openxmlformats.org/officeDocument/2006/relationships">
+  <p:cSld>
+    <p:bg>
+      <p:bgPr>
+        <a:solidFill>
+          <a:srgbClr val="FBF7EF"/>
+        </a:solidFill>
+        <a:effectLst/>
+      </p:bgPr>
+    </p:bg>
+    <p:spTree>
+      <p:nvGrpSpPr>
+        <p:cNvPr id="1" name=""/>
+        <p:cNvGrpSpPr/>
+        <p:nvPr/>
+      </p:nvGrpSpPr>
+      <p:grpSpPr/>
+      <p:sp>
+        <p:nvSpPr>
+          <p:cNvPr id="2" name="TextBox 1"/>
+          <p:cNvSpPr txBox="1"/>
+          <p:nvPr/>
+        </p:nvSpPr>
+        <p:spPr>
+          <a:xfrm>
+            <a:off x="640000" y="380000"/>
+            <a:ext cx="10912000" cy="420000"/>
+          </a:xfrm>
+          <a:prstGeom prst="rect">
+            <a:avLst/>
+          </a:prstGeom>
+          <a:noFill/>
+        </p:spPr>
+        <p:txBody>
+          <a:bodyPr wrap="square">
+            <a:spAutoFit/>
+          </a:bodyPr>
+          <a:lstStyle/>
+          <a:p>
+            <a:pPr>
+              <a:spcAft>
+                <a:spcPts val="630"/>
+              </a:spcAft>
+            </a:pPr>
+            <a:r>
+              <a:rPr sz="1400" b="1">
+                <a:solidFill>
+                  <a:srgbClr val="E8793A"/>
+                </a:solidFill>
+                <a:latin typeface="Nunito Sans"/>
+              </a:rPr>
+              <a:t>BLOQUE 1 · QUÉ ES EL HOMBRE DE PAJA</a:t>
+            </a:r>
+          </a:p>
+        </p:txBody>
+      </p:sp>
+      <p:sp>
+        <p:nvSpPr>
+          <p:cNvPr id="3" name="TextBox 2"/>
+          <p:cNvSpPr txBox="1"/>
+          <p:nvPr/>
+        </p:nvSpPr>
+        <p:spPr>
+          <a:xfrm>
+            <a:off x="640000" y="760000"/>
+            <a:ext cx="10912000" cy="800000"/>
+          </a:xfrm>
+          <a:prstGeom prst="rect">
+            <a:avLst/>
+          </a:prstGeom>
+          <a:noFill/>
+        </p:spPr>
+        <p:txBody>
+          <a:bodyPr wrap="square">
+            <a:spAutoFit/>
+          </a:bodyPr>
+          <a:lstStyle/>
+          <a:p>
+            <a:pPr>
+              <a:spcAft>
+                <a:spcPts val="1710"/>
+              </a:spcAft>
+            </a:pPr>
+            <a:r>
+              <a:rPr sz="3800" b="1">
+                <a:solidFill>
+                  <a:srgbClr val="1F2A44"/>
+                </a:solidFill>
+                <a:latin typeface="Fredoka"/>
+              </a:rPr>
+              <a:t>Lo que dijo y lo que atacan</a:t>
+            </a:r>
+          </a:p>
+        </p:txBody>
+      </p:sp>
+      <p:graphicFrame>
+        <p:nvGraphicFramePr>
+          <p:cNvPr id="4" name="Table 3"/>
+          <p:cNvGraphicFramePr>
+            <a:graphicFrameLocks noGrp="1"/>
+          </p:cNvGraphicFramePr>
+          <p:nvPr/>
+        </p:nvGraphicFramePr>
+        <p:xfrm>
+          <a:off x="640000" y="1700000"/>
+          <a:ext cx="10912000" cy="2400000"/>
+        </p:xfrm>
+        <a:graphic>
+          <a:graphicData uri="http://schemas.openxmlformats.org/drawingml/2006/table">
+            <a:tbl>
+              <a:tblPr firstRow="1" bandRow="1">
+                <a:tableStyleId>{5C22544A-7EE6-4342-B048-85BDC9FD1C3A}</a:tableStyleId>
+              </a:tblPr>
+              <a:tblGrid>
+                <a:gridCol w="5456000"/>
+                <a:gridCol w="5456000"/>
+              </a:tblGrid>
+              <a:tr h="600000">
+                <a:tc>
+                  <a:txBody>
+                    <a:bodyPr/>
+                    <a:lstStyle/>
+                    <a:p>
+                      <a:r>
+                        <a:rPr sz="2000" b="1">
+                          <a:solidFill>
+                            <a:srgbClr val="FBF7EF"/>
+                          </a:solidFill>
+                          <a:latin typeface="Fredoka"/>
+                        </a:rPr>
+                        <a:t>Lo que dijo</a:t>
+                      </a:r>
+                    </a:p>
+                  </a:txBody>
+                  <a:tcPr>
+                    <a:solidFill>
+                      <a:srgbClr val="1F2A44"/>
+                    </a:solidFill>
+                  </a:tcPr>
+                </a:tc>
+                <a:tc>
+                  <a:txBody>
+                    <a:bodyPr/>
+                    <a:lstStyle/>
+                    <a:p>
+                      <a:r>
+                        <a:rPr sz="2000" b="1">
+                          <a:solidFill>
+                            <a:srgbClr val="FBF7EF"/>
+                          </a:solidFill>
+                          <a:latin typeface="Fredoka"/>
+                        </a:rPr>
+                        <a:t>El muñeco de paja</a:t>
+                      </a:r>
+                    </a:p>
+                  </a:txBody>
+                  <a:tcPr>
+                    <a:solidFill>
+                      <a:srgbClr val="1F2A44"/>
+                    </a:solidFill>
+                  </a:tcPr>
+                </a:tc>
+              </a:tr>
+              <a:tr h="600000">
+                <a:tc>
+                  <a:txBody>
+                    <a:bodyPr/>
+                    <a:lstStyle/>
+                    <a:p>
+                      <a:r>
+                        <a:rPr sz="2000" b="0">
+                          <a:solidFill>
+                            <a:srgbClr val="1F2A44"/>
+                          </a:solidFill>
+                          <a:latin typeface="Nunito Sans"/>
+                        </a:rPr>
+                        <a:t>«Podríamos bajar la música en el patio»</a:t>
+                      </a:r>
+                    </a:p>
+                  </a:txBody>
+                  <a:tcPr>
+                    <a:solidFill>
+                      <a:srgbClr val="FFFFFF"/>
+                    </a:solidFill>
+                  </a:tcPr>
+                </a:tc>
+                <a:tc>
+                  <a:txBody>
+                    <a:bodyPr/>
+                    <a:lstStyle/>
+                    <a:p>
+                      <a:r>
+                        <a:rPr sz="2000" b="0">
+                          <a:solidFill>
+                            <a:srgbClr val="1F2A44"/>
+                          </a:solidFill>
+                          <a:latin typeface="Nunito Sans"/>
+                        </a:rPr>
+                        <a:t>«Quiere que el recreo sea una biblioteca»</a:t>
+                      </a:r>
+                    </a:p>
+                  </a:txBody>
+                  <a:tcPr>
+                    <a:solidFill>
+                      <a:srgbClr val="FFFFFF"/>
+                    </a:solidFill>
+                  </a:tcPr>
+                </a:tc>
+              </a:tr>
+              <a:tr h="600000">
+                <a:tc>
+                  <a:txBody>
+                    <a:bodyPr/>
+                    <a:lstStyle/>
+                    <a:p>
+                      <a:r>
+                        <a:rPr sz="2000" b="0">
+                          <a:solidFill>
+                            <a:srgbClr val="1F2A44"/>
+                          </a:solidFill>
+                          <a:latin typeface="Nunito Sans"/>
+                        </a:rPr>
+                        <a:t>«Estoy cansada, hoy no salgo»</a:t>
+                      </a:r>
+                    </a:p>
+                  </a:txBody>
+                  <a:tcPr>
+                    <a:solidFill>
+                      <a:srgbClr val="EAF0F7"/>
+                    </a:solidFill>
+                  </a:tcPr>
+                </a:tc>
+                <a:tc>
+                  <a:txBody>
+                    <a:bodyPr/>
+                    <a:lstStyle/>
+                    <a:p>
+                      <a:r>
+                        <a:rPr sz="2000" b="0">
+                          <a:solidFill>
+                            <a:srgbClr val="1F2A44"/>
+                          </a:solidFill>
+                          <a:latin typeface="Nunito Sans"/>
+                        </a:rPr>
+                        <a:t>«Ya no te importa la cuadrilla»</a:t>
+                      </a:r>
+                    </a:p>
+                  </a:txBody>
+                  <a:tcPr>
+                    <a:solidFill>
+                      <a:srgbClr val="EAF0F7"/>
+                    </a:solidFill>
+                  </a:tcPr>
+                </a:tc>
+              </a:tr>
+              <a:tr h="600000">
+                <a:tc>
+                  <a:txBody>
+                    <a:bodyPr/>
+                    <a:lstStyle/>
+                    <a:p>
+                      <a:r>
+                        <a:rPr sz="2000" b="0">
+                          <a:solidFill>
+                            <a:srgbClr val="1F2A44"/>
+                          </a:solidFill>
+                          <a:latin typeface="Nunito Sans"/>
+                        </a:rPr>
+                        <a:t>«Este juego tiene demasiados anuncios»</a:t>
+                      </a:r>
+                    </a:p>
+                  </a:txBody>
+                  <a:tcPr>
+                    <a:solidFill>
+                      <a:srgbClr val="FFFFFF"/>
+                    </a:solidFill>
+                  </a:tcPr>
+                </a:tc>
+                <a:tc>
+                  <a:txBody>
+                    <a:bodyPr/>
+                    <a:lstStyle/>
+                    <a:p>
+                      <a:r>
+                        <a:rPr sz="2000" b="0">
+                          <a:solidFill>
+                            <a:srgbClr val="1F2A44"/>
+                          </a:solidFill>
+                          <a:latin typeface="Nunito Sans"/>
+                        </a:rPr>
+                        <a:t>«Odias los videojuegos»</a:t>
+                      </a:r>
+                    </a:p>
+                  </a:txBody>
+                  <a:tcPr>
+                    <a:solidFill>
+                      <a:srgbClr val="FFFFFF"/>
+                    </a:solidFill>
+                  </a:tcPr>
+                </a:tc>
+              </a:tr>
+            </a:tbl>
+          </a:graphicData>
+        </a:graphic>
+      </p:graphicFrame>
+    </p:spTree>
+  </p:cSld>
+  <p:clrMapOvr>
+    <a:masterClrMapping/>
+  </p:clrMapOvr>
+</p:sld>
+</file>
+
+<file path=ppt/slides/slide9.xml><?xml version="1.0" encoding="utf-8"?>
 <p:sld xmlns:a="http://schemas.openxmlformats.org/drawingml/2006/main" xmlns:p="http://schemas.openxmlformats.org/presentationml/2006/main" xmlns:r="http://schemas.openxmlformats.org/officeDocument/2006/relationships">
   <p:cSld>
     <p:bg>
@@ -7489,315 +8106,6 @@
                 <a:latin typeface="Fredoka"/>
               </a:rPr>
               <a:t>Casos resueltos</a:t>
-            </a:r>
-          </a:p>
-        </p:txBody>
-      </p:sp>
-    </p:spTree>
-  </p:cSld>
-  <p:clrMapOvr>
-    <a:masterClrMapping/>
-  </p:clrMapOvr>
-</p:sld>
-</file>
-
-<file path=ppt/slides/slide9.xml><?xml version="1.0" encoding="utf-8"?>
-<p:sld xmlns:a="http://schemas.openxmlformats.org/drawingml/2006/main" xmlns:p="http://schemas.openxmlformats.org/presentationml/2006/main" xmlns:r="http://schemas.openxmlformats.org/officeDocument/2006/relationships">
-  <p:cSld>
-    <p:bg>
-      <p:bgPr>
-        <a:solidFill>
-          <a:srgbClr val="FBF7EF"/>
-        </a:solidFill>
-        <a:effectLst/>
-      </p:bgPr>
-    </p:bg>
-    <p:spTree>
-      <p:nvGrpSpPr>
-        <p:cNvPr id="1" name=""/>
-        <p:cNvGrpSpPr/>
-        <p:nvPr/>
-      </p:nvGrpSpPr>
-      <p:grpSpPr/>
-      <p:sp>
-        <p:nvSpPr>
-          <p:cNvPr id="2" name="TextBox 1"/>
-          <p:cNvSpPr txBox="1"/>
-          <p:nvPr/>
-        </p:nvSpPr>
-        <p:spPr>
-          <a:xfrm>
-            <a:off x="640000" y="380000"/>
-            <a:ext cx="10912000" cy="420000"/>
-          </a:xfrm>
-          <a:prstGeom prst="rect">
-            <a:avLst/>
-          </a:prstGeom>
-          <a:noFill/>
-        </p:spPr>
-        <p:txBody>
-          <a:bodyPr wrap="square">
-            <a:spAutoFit/>
-          </a:bodyPr>
-          <a:lstStyle/>
-          <a:p>
-            <a:pPr>
-              <a:spcAft>
-                <a:spcPts val="630"/>
-              </a:spcAft>
-            </a:pPr>
-            <a:r>
-              <a:rPr sz="1400" b="1">
-                <a:solidFill>
-                  <a:srgbClr val="E8793A"/>
-                </a:solidFill>
-                <a:latin typeface="Nunito Sans"/>
-              </a:rPr>
-              <a:t>BLOQUE 2 · CASOS RESUELTOS</a:t>
-            </a:r>
-          </a:p>
-        </p:txBody>
-      </p:sp>
-      <p:sp>
-        <p:nvSpPr>
-          <p:cNvPr id="3" name="TextBox 2"/>
-          <p:cNvSpPr txBox="1"/>
-          <p:nvPr/>
-        </p:nvSpPr>
-        <p:spPr>
-          <a:xfrm>
-            <a:off x="640000" y="760000"/>
-            <a:ext cx="10912000" cy="800000"/>
-          </a:xfrm>
-          <a:prstGeom prst="rect">
-            <a:avLst/>
-          </a:prstGeom>
-          <a:noFill/>
-        </p:spPr>
-        <p:txBody>
-          <a:bodyPr wrap="square">
-            <a:spAutoFit/>
-          </a:bodyPr>
-          <a:lstStyle/>
-          <a:p>
-            <a:pPr>
-              <a:spcAft>
-                <a:spcPts val="1710"/>
-              </a:spcAft>
-            </a:pPr>
-            <a:r>
-              <a:rPr sz="3800" b="1">
-                <a:solidFill>
-                  <a:srgbClr val="1F2A44"/>
-                </a:solidFill>
-                <a:latin typeface="Fredoka"/>
-              </a:rPr>
-              <a:t>Caso 1 · Hasta las diez</a:t>
-            </a:r>
-          </a:p>
-        </p:txBody>
-      </p:sp>
-      <p:sp>
-        <p:nvSpPr>
-          <p:cNvPr id="4" name="Rectangle 3"/>
-          <p:cNvSpPr/>
-          <p:nvPr/>
-        </p:nvSpPr>
-        <p:spPr>
-          <a:xfrm>
-            <a:off x="640000" y="1600000"/>
-            <a:ext cx="10912000" cy="1100000"/>
-          </a:xfrm>
-          <a:prstGeom prst="rect">
-            <a:avLst/>
-          </a:prstGeom>
-          <a:solidFill>
-            <a:srgbClr val="FFFFFF"/>
-          </a:solidFill>
-          <a:ln>
-            <a:noFill/>
-          </a:ln>
-        </p:spPr>
-        <p:style>
-          <a:lnRef idx="1">
-            <a:schemeClr val="accent1"/>
-          </a:lnRef>
-          <a:fillRef idx="3">
-            <a:schemeClr val="accent1"/>
-          </a:fillRef>
-          <a:effectRef idx="2">
-            <a:schemeClr val="accent1"/>
-          </a:effectRef>
-          <a:fontRef idx="minor">
-            <a:schemeClr val="lt1"/>
-          </a:fontRef>
-        </p:style>
-        <p:txBody>
-          <a:bodyPr rtlCol="0" anchor="ctr"/>
-          <a:lstStyle/>
-          <a:p>
-            <a:pPr algn="ctr"/>
-          </a:p>
-        </p:txBody>
-      </p:sp>
-      <p:sp>
-        <p:nvSpPr>
-          <p:cNvPr id="5" name="TextBox 4"/>
-          <p:cNvSpPr txBox="1"/>
-          <p:nvPr/>
-        </p:nvSpPr>
-        <p:spPr>
-          <a:xfrm>
-            <a:off x="840000" y="1650000"/>
-            <a:ext cx="10512000" cy="1000000"/>
-          </a:xfrm>
-          <a:prstGeom prst="rect">
-            <a:avLst/>
-          </a:prstGeom>
-          <a:noFill/>
-        </p:spPr>
-        <p:txBody>
-          <a:bodyPr wrap="square" anchor="ctr">
-            <a:spAutoFit/>
-          </a:bodyPr>
-          <a:lstStyle/>
-          <a:p>
-            <a:pPr>
-              <a:spcAft>
-                <a:spcPts val="1170"/>
-              </a:spcAft>
-            </a:pPr>
-            <a:r>
-              <a:rPr sz="2600" b="1">
-                <a:solidFill>
-                  <a:srgbClr val="1F2A44"/>
-                </a:solidFill>
-                <a:latin typeface="Nunito Sans"/>
-              </a:rPr>
-              <a:t>«Si hoy te dejo quedarte hasta las diez, mañana querrás hasta las doce, y acabarás no volviendo a casa.»</a:t>
-            </a:r>
-          </a:p>
-        </p:txBody>
-      </p:sp>
-      <p:sp>
-        <p:nvSpPr>
-          <p:cNvPr id="6" name="TextBox 5"/>
-          <p:cNvSpPr txBox="1"/>
-          <p:nvPr/>
-        </p:nvSpPr>
-        <p:spPr>
-          <a:xfrm>
-            <a:off x="640000" y="2900000"/>
-            <a:ext cx="10912000" cy="3500000"/>
-          </a:xfrm>
-          <a:prstGeom prst="rect">
-            <a:avLst/>
-          </a:prstGeom>
-          <a:noFill/>
-        </p:spPr>
-        <p:txBody>
-          <a:bodyPr wrap="square">
-            <a:spAutoFit/>
-          </a:bodyPr>
-          <a:lstStyle/>
-          <a:p>
-            <a:pPr>
-              <a:spcAft>
-                <a:spcPts val="1080"/>
-              </a:spcAft>
-            </a:pPr>
-            <a:r>
-              <a:rPr sz="2400" b="1">
-                <a:solidFill>
-                  <a:srgbClr val="E8793A"/>
-                </a:solidFill>
-                <a:latin typeface="Nunito Sans"/>
-              </a:rPr>
-              <a:t>1. </a:t>
-            </a:r>
-            <a:r>
-              <a:rPr sz="2400" b="0">
-                <a:solidFill>
-                  <a:srgbClr val="1F2A44"/>
-                </a:solidFill>
-                <a:latin typeface="Nunito Sans"/>
-              </a:rPr>
-              <a:t>¿Primer paso? Quedarse hasta las diez un día.</a:t>
-            </a:r>
-          </a:p>
-          <a:p>
-            <a:pPr>
-              <a:spcAft>
-                <a:spcPts val="1080"/>
-              </a:spcAft>
-            </a:pPr>
-            <a:r>
-              <a:rPr sz="2400" b="1">
-                <a:solidFill>
-                  <a:srgbClr val="E8793A"/>
-                </a:solidFill>
-                <a:latin typeface="Nunito Sans"/>
-              </a:rPr>
-              <a:t>2. </a:t>
-            </a:r>
-            <a:r>
-              <a:rPr sz="2400" b="0">
-                <a:solidFill>
-                  <a:srgbClr val="1F2A44"/>
-                </a:solidFill>
-                <a:latin typeface="Nunito Sans"/>
-              </a:rPr>
-              <a:t>¿Final? No volver a casa.</a:t>
-            </a:r>
-          </a:p>
-          <a:p>
-            <a:pPr>
-              <a:spcAft>
-                <a:spcPts val="1080"/>
-              </a:spcAft>
-            </a:pPr>
-            <a:r>
-              <a:rPr sz="2400" b="1">
-                <a:solidFill>
-                  <a:srgbClr val="E8793A"/>
-                </a:solidFill>
-                <a:latin typeface="Nunito Sans"/>
-              </a:rPr>
-              <a:t>3. </a:t>
-            </a:r>
-            <a:r>
-              <a:rPr sz="2400" b="0">
-                <a:solidFill>
-                  <a:srgbClr val="1F2A44"/>
-                </a:solidFill>
-                <a:latin typeface="Nunito Sans"/>
-              </a:rPr>
-              <a:t>¿Un paso lleva seguro al siguiente? No: los padres pueden decir que no a las doce.</a:t>
-            </a:r>
-          </a:p>
-          <a:p>
-            <a:pPr>
-              <a:spcAft>
-                <a:spcPts val="1080"/>
-              </a:spcAft>
-            </a:pPr>
-            <a:r>
-              <a:rPr sz="2400" b="1">
-                <a:solidFill>
-                  <a:srgbClr val="E8793A"/>
-                </a:solidFill>
-                <a:latin typeface="Nunito Sans"/>
-              </a:rPr>
-              <a:t>4. </a:t>
-            </a:r>
-            <a:r>
-              <a:rPr sz="2400" b="0">
-                <a:solidFill>
-                  <a:srgbClr val="1F2A44"/>
-                </a:solidFill>
-                <a:latin typeface="Nunito Sans"/>
-              </a:rPr>
-              <a:t>Conclusión: pendiente resbaladiza. Se puede hablar del primer paso sin saltar al final.</a:t>
             </a:r>
           </a:p>
         </p:txBody>
